--- a/fixtures/rules/off-pack-font--pos.pptx
+++ b/fixtures/rules/off-pack-font--pos.pptx
@@ -8,6 +8,8 @@
     <p:sldId id="256" r:id="rId6"/>
     <p:sldId id="257" r:id="rId8"/>
     <p:sldId id="258" r:id="rId9"/>
+    <p:sldId id="259" r:id="rId10"/>
+    <p:sldId id="260" r:id="rId11"/>
   </p:sldIdLst>
   <p:sldSz cx="12192000" cy="6858000"/>
   <p:notesSz cx="6858000" cy="9144000"/>
@@ -669,6 +671,146 @@
 </file>
 
 <file path=ppt/notesSlides/notesSlide3.xml><?xml version="1.0" encoding="utf-8"?>
+<p:notes xmlns:a="http://schemas.openxmlformats.org/drawingml/2006/main" xmlns:p="http://schemas.openxmlformats.org/presentationml/2006/main" xmlns:r="http://schemas.openxmlformats.org/officeDocument/2006/relationships">
+  <p:cSld>
+    <p:spTree>
+      <p:nvGrpSpPr>
+        <p:cNvPr id="1" name=""/>
+        <p:cNvGrpSpPr/>
+        <p:nvPr/>
+      </p:nvGrpSpPr>
+      <p:grpSpPr>
+        <a:xfrm>
+          <a:off x="0" y="0"/>
+          <a:ext cx="0" cy="0"/>
+          <a:chOff x="0" y="0"/>
+          <a:chExt cx="0" cy="0"/>
+        </a:xfrm>
+      </p:grpSpPr>
+      <p:sp>
+        <p:nvSpPr>
+          <p:cNvPr id="2" name="Slide Image Placeholder 1"/>
+          <p:cNvSpPr>
+            <a:spLocks noGrp="1"/>
+          </p:cNvSpPr>
+          <p:nvPr>
+            <p:ph type="sldImg" idx="2"/>
+          </p:nvPr>
+        </p:nvSpPr>
+        <p:spPr/>
+      </p:sp>
+      <p:sp>
+        <p:nvSpPr>
+          <p:cNvPr id="3" name="Notes Placeholder 2"/>
+          <p:cNvSpPr>
+            <a:spLocks noGrp="1"/>
+          </p:cNvSpPr>
+          <p:nvPr>
+            <p:ph type="body" idx="3" sz="quarter"/>
+          </p:nvPr>
+        </p:nvSpPr>
+        <p:spPr/>
+        <p:txBody>
+          <a:bodyPr/>
+          <a:lstStyle/>
+          <a:p>
+            <a:r>
+              <a:t>n</a:t>
+            </a:r>
+          </a:p>
+        </p:txBody>
+      </p:sp>
+      <p:sp>
+        <p:nvSpPr>
+          <p:cNvPr id="4" name="Slide Number Placeholder 3"/>
+          <p:cNvSpPr>
+            <a:spLocks noGrp="1"/>
+          </p:cNvSpPr>
+          <p:nvPr>
+            <p:ph type="sldNum" idx="5" sz="quarter"/>
+          </p:nvPr>
+        </p:nvSpPr>
+        <p:spPr/>
+      </p:sp>
+    </p:spTree>
+  </p:cSld>
+  <p:clrMapOvr>
+    <a:masterClrMapping/>
+  </p:clrMapOvr>
+</p:notes>
+</file>
+
+<file path=ppt/notesSlides/notesSlide4.xml><?xml version="1.0" encoding="utf-8"?>
+<p:notes xmlns:a="http://schemas.openxmlformats.org/drawingml/2006/main" xmlns:p="http://schemas.openxmlformats.org/presentationml/2006/main" xmlns:r="http://schemas.openxmlformats.org/officeDocument/2006/relationships">
+  <p:cSld>
+    <p:spTree>
+      <p:nvGrpSpPr>
+        <p:cNvPr id="1" name=""/>
+        <p:cNvGrpSpPr/>
+        <p:nvPr/>
+      </p:nvGrpSpPr>
+      <p:grpSpPr>
+        <a:xfrm>
+          <a:off x="0" y="0"/>
+          <a:ext cx="0" cy="0"/>
+          <a:chOff x="0" y="0"/>
+          <a:chExt cx="0" cy="0"/>
+        </a:xfrm>
+      </p:grpSpPr>
+      <p:sp>
+        <p:nvSpPr>
+          <p:cNvPr id="2" name="Slide Image Placeholder 1"/>
+          <p:cNvSpPr>
+            <a:spLocks noGrp="1"/>
+          </p:cNvSpPr>
+          <p:nvPr>
+            <p:ph type="sldImg" idx="2"/>
+          </p:nvPr>
+        </p:nvSpPr>
+        <p:spPr/>
+      </p:sp>
+      <p:sp>
+        <p:nvSpPr>
+          <p:cNvPr id="3" name="Notes Placeholder 2"/>
+          <p:cNvSpPr>
+            <a:spLocks noGrp="1"/>
+          </p:cNvSpPr>
+          <p:nvPr>
+            <p:ph type="body" idx="3" sz="quarter"/>
+          </p:nvPr>
+        </p:nvSpPr>
+        <p:spPr/>
+        <p:txBody>
+          <a:bodyPr/>
+          <a:lstStyle/>
+          <a:p>
+            <a:r>
+              <a:t>n</a:t>
+            </a:r>
+          </a:p>
+        </p:txBody>
+      </p:sp>
+      <p:sp>
+        <p:nvSpPr>
+          <p:cNvPr id="4" name="Slide Number Placeholder 3"/>
+          <p:cNvSpPr>
+            <a:spLocks noGrp="1"/>
+          </p:cNvSpPr>
+          <p:nvPr>
+            <p:ph type="sldNum" idx="5" sz="quarter"/>
+          </p:nvPr>
+        </p:nvSpPr>
+        <p:spPr/>
+      </p:sp>
+    </p:spTree>
+  </p:cSld>
+  <p:clrMapOvr>
+    <a:masterClrMapping/>
+  </p:clrMapOvr>
+</p:notes>
+</file>
+
+<file path=ppt/notesSlides/notesSlide5.xml><?xml version="1.0" encoding="utf-8"?>
 <p:notes xmlns:a="http://schemas.openxmlformats.org/drawingml/2006/main" xmlns:p="http://schemas.openxmlformats.org/presentationml/2006/main" xmlns:r="http://schemas.openxmlformats.org/officeDocument/2006/relationships">
   <p:cSld>
     <p:spTree>
@@ -2818,6 +2960,152 @@
 </p:sld>
 </file>
 
+<file path=ppt/slides/slide4.xml><?xml version="1.0" encoding="utf-8"?>
+<p:sld xmlns:a="http://schemas.openxmlformats.org/drawingml/2006/main" xmlns:p="http://schemas.openxmlformats.org/presentationml/2006/main" xmlns:r="http://schemas.openxmlformats.org/officeDocument/2006/relationships">
+  <p:cSld>
+    <p:spTree>
+      <p:nvGrpSpPr>
+        <p:cNvPr id="1" name=""/>
+        <p:cNvGrpSpPr/>
+        <p:nvPr/>
+      </p:nvGrpSpPr>
+      <p:grpSpPr/>
+      <p:sp>
+        <p:nvSpPr>
+          <p:cNvPr id="2" name="Title 1"/>
+          <p:cNvSpPr>
+            <a:spLocks noGrp="1"/>
+          </p:cNvSpPr>
+          <p:nvPr>
+            <p:ph type="title"/>
+          </p:nvPr>
+        </p:nvSpPr>
+        <p:spPr/>
+        <p:txBody>
+          <a:bodyPr/>
+          <a:lstStyle/>
+          <a:p>
+            <a:r>
+              <a:t>Keepers wait a season before a match</a:t>
+            </a:r>
+          </a:p>
+        </p:txBody>
+      </p:sp>
+      <p:sp>
+        <p:nvSpPr>
+          <p:cNvPr id="3" name="line"/>
+          <p:cNvSpPr txBox="1"/>
+          <p:nvPr/>
+        </p:nvSpPr>
+        <p:spPr>
+          <a:xfrm>
+            <a:off x="540000" y="2160000"/>
+            <a:ext cx="7200000" cy="720000"/>
+          </a:xfrm>
+          <a:prstGeom prst="rect">
+            <a:avLst/>
+          </a:prstGeom>
+          <a:noFill/>
+        </p:spPr>
+        <p:txBody>
+          <a:bodyPr wrap="square">
+            <a:spAutoFit/>
+          </a:bodyPr>
+          <a:lstStyle/>
+          <a:p>
+            <a:r>
+              <a:rPr sz="2400" b="0">
+                <a:solidFill>
+                  <a:srgbClr val="111111"/>
+                </a:solidFill>
+                <a:latin typeface="Arial Black"/>
+              </a:rPr>
+              <a:t>Line 4 in Arial Black</a:t>
+            </a:r>
+          </a:p>
+        </p:txBody>
+      </p:sp>
+    </p:spTree>
+  </p:cSld>
+  <p:clrMapOvr>
+    <a:masterClrMapping/>
+  </p:clrMapOvr>
+</p:sld>
+</file>
+
+<file path=ppt/slides/slide5.xml><?xml version="1.0" encoding="utf-8"?>
+<p:sld xmlns:a="http://schemas.openxmlformats.org/drawingml/2006/main" xmlns:p="http://schemas.openxmlformats.org/presentationml/2006/main" xmlns:r="http://schemas.openxmlformats.org/officeDocument/2006/relationships">
+  <p:cSld>
+    <p:spTree>
+      <p:nvGrpSpPr>
+        <p:cNvPr id="1" name=""/>
+        <p:cNvGrpSpPr/>
+        <p:nvPr/>
+      </p:nvGrpSpPr>
+      <p:grpSpPr/>
+      <p:sp>
+        <p:nvSpPr>
+          <p:cNvPr id="2" name="Title 1"/>
+          <p:cNvSpPr>
+            <a:spLocks noGrp="1"/>
+          </p:cNvSpPr>
+          <p:nvPr>
+            <p:ph type="title"/>
+          </p:nvPr>
+        </p:nvSpPr>
+        <p:spPr/>
+        <p:txBody>
+          <a:bodyPr/>
+          <a:lstStyle/>
+          <a:p>
+            <a:r>
+              <a:t>Keepers wait a season before a match</a:t>
+            </a:r>
+          </a:p>
+        </p:txBody>
+      </p:sp>
+      <p:sp>
+        <p:nvSpPr>
+          <p:cNvPr id="3" name="line"/>
+          <p:cNvSpPr txBox="1"/>
+          <p:nvPr/>
+        </p:nvSpPr>
+        <p:spPr>
+          <a:xfrm>
+            <a:off x="540000" y="2160000"/>
+            <a:ext cx="7200000" cy="720000"/>
+          </a:xfrm>
+          <a:prstGeom prst="rect">
+            <a:avLst/>
+          </a:prstGeom>
+          <a:noFill/>
+        </p:spPr>
+        <p:txBody>
+          <a:bodyPr wrap="square">
+            <a:spAutoFit/>
+          </a:bodyPr>
+          <a:lstStyle/>
+          <a:p>
+            <a:r>
+              <a:rPr sz="2400" b="0">
+                <a:solidFill>
+                  <a:srgbClr val="111111"/>
+                </a:solidFill>
+                <a:latin typeface="Arial Narrow"/>
+              </a:rPr>
+              <a:t>Line 5 in Arial Narrow</a:t>
+            </a:r>
+          </a:p>
+        </p:txBody>
+      </p:sp>
+    </p:spTree>
+  </p:cSld>
+  <p:clrMapOvr>
+    <a:masterClrMapping/>
+  </p:clrMapOvr>
+</p:sld>
+</file>
+
 <file path=ppt/theme/theme1.xml><?xml version="1.0" encoding="utf-8"?>
 <a:theme xmlns:a="http://schemas.openxmlformats.org/drawingml/2006/main" name="keyline swiss">
   <a:themeElements>

--- a/fixtures/rules/off-pack-font--pos.pptx
+++ b/fixtures/rules/off-pack-font--pos.pptx
@@ -918,7 +918,7 @@
           <a:noFill/>
         </p:spPr>
         <p:txBody>
-          <a:bodyPr vert="horz" wrap="square" lIns="0" tIns="0" rIns="0" bIns="0" rtlCol="0" anchor="t">
+          <a:bodyPr vert="horz" wrap="square" lIns="0" tIns="0" rIns="0" bIns="18582" rtlCol="0" anchor="b">
             <a:noAutofit/>
           </a:bodyPr>
           <a:lstStyle>
@@ -1417,7 +1417,7 @@
           <a:noFill/>
         </p:spPr>
         <p:txBody>
-          <a:bodyPr vert="horz" wrap="square" lIns="0" tIns="0" rIns="0" bIns="0" rtlCol="0" anchor="t">
+          <a:bodyPr vert="horz" wrap="square" lIns="0" tIns="0" rIns="0" bIns="13514" rtlCol="0" anchor="b">
             <a:noAutofit/>
           </a:bodyPr>
           <a:lstStyle>
@@ -1598,7 +1598,7 @@
           <a:noFill/>
         </p:spPr>
         <p:txBody>
-          <a:bodyPr vert="horz" wrap="square" lIns="0" tIns="0" rIns="0" bIns="0" rtlCol="0" anchor="t">
+          <a:bodyPr vert="horz" wrap="square" lIns="0" tIns="0" rIns="0" bIns="13514" rtlCol="0" anchor="b">
             <a:noAutofit/>
           </a:bodyPr>
           <a:lstStyle>
@@ -1960,7 +1960,7 @@
           <a:noFill/>
         </p:spPr>
         <p:txBody>
-          <a:bodyPr vert="horz" wrap="square" lIns="0" tIns="0" rIns="0" bIns="0" rtlCol="0" anchor="t">
+          <a:bodyPr vert="horz" wrap="square" lIns="0" tIns="0" rIns="0" bIns="18582" rtlCol="0" anchor="b">
             <a:noAutofit/>
           </a:bodyPr>
           <a:lstStyle>

--- a/fixtures/rules/off-pack-font--pos.pptx
+++ b/fixtures/rules/off-pack-font--pos.pptx
@@ -918,7 +918,7 @@
           <a:noFill/>
         </p:spPr>
         <p:txBody>
-          <a:bodyPr vert="horz" wrap="square" lIns="0" tIns="0" rIns="0" bIns="18582" rtlCol="0" anchor="b">
+          <a:bodyPr vert="horz" wrap="square" lIns="0" tIns="0" rIns="0" bIns="41910" rtlCol="0" anchor="b">
             <a:noAutofit/>
           </a:bodyPr>
           <a:lstStyle>
@@ -1417,7 +1417,7 @@
           <a:noFill/>
         </p:spPr>
         <p:txBody>
-          <a:bodyPr vert="horz" wrap="square" lIns="0" tIns="0" rIns="0" bIns="13514" rtlCol="0" anchor="b">
+          <a:bodyPr vert="horz" wrap="square" lIns="0" tIns="0" rIns="0" bIns="30480" rtlCol="0" anchor="b">
             <a:noAutofit/>
           </a:bodyPr>
           <a:lstStyle>
@@ -1598,7 +1598,7 @@
           <a:noFill/>
         </p:spPr>
         <p:txBody>
-          <a:bodyPr vert="horz" wrap="square" lIns="0" tIns="0" rIns="0" bIns="13514" rtlCol="0" anchor="b">
+          <a:bodyPr vert="horz" wrap="square" lIns="0" tIns="0" rIns="0" bIns="30480" rtlCol="0" anchor="b">
             <a:noAutofit/>
           </a:bodyPr>
           <a:lstStyle>
@@ -1960,7 +1960,7 @@
           <a:noFill/>
         </p:spPr>
         <p:txBody>
-          <a:bodyPr vert="horz" wrap="square" lIns="0" tIns="0" rIns="0" bIns="18582" rtlCol="0" anchor="b">
+          <a:bodyPr vert="horz" wrap="square" lIns="0" tIns="0" rIns="0" bIns="41910" rtlCol="0" anchor="b">
             <a:noAutofit/>
           </a:bodyPr>
           <a:lstStyle>

--- a/fixtures/rules/off-pack-font--pos.pptx
+++ b/fixtures/rules/off-pack-font--pos.pptx
@@ -30,6 +30,7 @@
           <a:srgbClr val="111111"/>
         </a:solidFill>
         <a:latin typeface="+mn-lt"/>
+        <a:cs typeface="+mn-cs"/>
       </a:defRPr>
     </a:lvl1pPr>
     <a:lvl2pPr marL="0" indent="0" algn="l">
@@ -48,6 +49,7 @@
           <a:srgbClr val="111111"/>
         </a:solidFill>
         <a:latin typeface="+mn-lt"/>
+        <a:cs typeface="+mn-cs"/>
       </a:defRPr>
     </a:lvl2pPr>
     <a:lvl3pPr marL="0" indent="0" algn="l">
@@ -66,6 +68,7 @@
           <a:srgbClr val="111111"/>
         </a:solidFill>
         <a:latin typeface="+mn-lt"/>
+        <a:cs typeface="+mn-cs"/>
       </a:defRPr>
     </a:lvl3pPr>
     <a:lvl4pPr marL="0" indent="0" algn="l">
@@ -84,6 +87,7 @@
           <a:srgbClr val="111111"/>
         </a:solidFill>
         <a:latin typeface="+mn-lt"/>
+        <a:cs typeface="+mn-cs"/>
       </a:defRPr>
     </a:lvl4pPr>
     <a:lvl5pPr marL="0" indent="0" algn="l">
@@ -102,6 +106,7 @@
           <a:srgbClr val="111111"/>
         </a:solidFill>
         <a:latin typeface="+mn-lt"/>
+        <a:cs typeface="+mn-cs"/>
       </a:defRPr>
     </a:lvl5pPr>
     <a:lvl6pPr marL="0" indent="0" algn="l">
@@ -120,6 +125,7 @@
           <a:srgbClr val="111111"/>
         </a:solidFill>
         <a:latin typeface="+mn-lt"/>
+        <a:cs typeface="+mn-cs"/>
       </a:defRPr>
     </a:lvl6pPr>
     <a:lvl7pPr marL="0" indent="0" algn="l">
@@ -138,6 +144,7 @@
           <a:srgbClr val="111111"/>
         </a:solidFill>
         <a:latin typeface="+mn-lt"/>
+        <a:cs typeface="+mn-cs"/>
       </a:defRPr>
     </a:lvl7pPr>
     <a:lvl8pPr marL="0" indent="0" algn="l">
@@ -156,6 +163,7 @@
           <a:srgbClr val="111111"/>
         </a:solidFill>
         <a:latin typeface="+mn-lt"/>
+        <a:cs typeface="+mn-cs"/>
       </a:defRPr>
     </a:lvl8pPr>
     <a:lvl9pPr marL="0" indent="0" algn="l">
@@ -174,6 +182,7 @@
           <a:srgbClr val="111111"/>
         </a:solidFill>
         <a:latin typeface="+mn-lt"/>
+        <a:cs typeface="+mn-cs"/>
       </a:defRPr>
     </a:lvl9pPr>
   </p:defaultTextStyle>
@@ -938,6 +947,7 @@
                   <a:srgbClr val="111111"/>
                 </a:solidFill>
                 <a:latin typeface="+mj-lt"/>
+                <a:cs typeface="+mj-cs"/>
               </a:defRPr>
             </a:lvl1pPr>
           </a:lstStyle>
@@ -990,6 +1000,7 @@
                   <a:srgbClr val="111111"/>
                 </a:solidFill>
                 <a:latin typeface="+mn-lt"/>
+                <a:cs typeface="+mn-cs"/>
               </a:defRPr>
             </a:lvl1pPr>
           </a:lstStyle>
@@ -1042,6 +1053,7 @@
                   <a:srgbClr val="5C5C5A"/>
                 </a:solidFill>
                 <a:latin typeface="+mn-lt"/>
+                <a:cs typeface="+mn-cs"/>
               </a:defRPr>
             </a:lvl1pPr>
           </a:lstStyle>
@@ -1127,6 +1139,7 @@
                   <a:srgbClr val="F2F2F0"/>
                 </a:solidFill>
                 <a:latin typeface="+mj-lt"/>
+                <a:cs typeface="+mj-cs"/>
               </a:defRPr>
             </a:lvl1pPr>
           </a:lstStyle>
@@ -1179,6 +1192,7 @@
                   <a:srgbClr val="E8422E"/>
                 </a:solidFill>
                 <a:latin typeface="+mn-lt"/>
+                <a:cs typeface="+mn-cs"/>
               </a:defRPr>
             </a:lvl1pPr>
           </a:lstStyle>
@@ -1256,6 +1270,7 @@
                   <a:srgbClr val="111111"/>
                 </a:solidFill>
                 <a:latin typeface="+mj-lt"/>
+                <a:cs typeface="+mj-cs"/>
               </a:defRPr>
             </a:lvl1pPr>
           </a:lstStyle>
@@ -1308,6 +1323,7 @@
                   <a:srgbClr val="111111"/>
                 </a:solidFill>
                 <a:latin typeface="+mn-lt"/>
+                <a:cs typeface="+mn-cs"/>
               </a:defRPr>
             </a:lvl1pPr>
           </a:lstStyle>
@@ -1360,6 +1376,7 @@
                   <a:srgbClr val="5C5C5A"/>
                 </a:solidFill>
                 <a:latin typeface="+mn-lt"/>
+                <a:cs typeface="+mn-cs"/>
               </a:defRPr>
             </a:lvl1pPr>
           </a:lstStyle>
@@ -1437,6 +1454,7 @@
                   <a:srgbClr val="111111"/>
                 </a:solidFill>
                 <a:latin typeface="+mj-lt"/>
+                <a:cs typeface="+mj-cs"/>
               </a:defRPr>
             </a:lvl1pPr>
           </a:lstStyle>
@@ -1489,6 +1507,7 @@
                   <a:srgbClr val="111111"/>
                 </a:solidFill>
                 <a:latin typeface="+mn-lt"/>
+                <a:cs typeface="+mn-cs"/>
               </a:defRPr>
             </a:lvl1pPr>
           </a:lstStyle>
@@ -1541,6 +1560,7 @@
                   <a:srgbClr val="5C5C5A"/>
                 </a:solidFill>
                 <a:latin typeface="+mn-lt"/>
+                <a:cs typeface="+mn-cs"/>
               </a:defRPr>
             </a:lvl1pPr>
           </a:lstStyle>
@@ -1618,6 +1638,7 @@
                   <a:srgbClr val="111111"/>
                 </a:solidFill>
                 <a:latin typeface="+mj-lt"/>
+                <a:cs typeface="+mj-cs"/>
               </a:defRPr>
             </a:lvl1pPr>
           </a:lstStyle>
@@ -1670,6 +1691,7 @@
                   <a:srgbClr val="111111"/>
                 </a:solidFill>
                 <a:latin typeface="+mn-lt"/>
+                <a:cs typeface="+mn-cs"/>
               </a:defRPr>
             </a:lvl1pPr>
           </a:lstStyle>
@@ -1722,6 +1744,7 @@
                   <a:srgbClr val="111111"/>
                 </a:solidFill>
                 <a:latin typeface="+mn-lt"/>
+                <a:cs typeface="+mn-cs"/>
               </a:defRPr>
             </a:lvl1pPr>
           </a:lstStyle>
@@ -1774,6 +1797,7 @@
                   <a:srgbClr val="5C5C5A"/>
                 </a:solidFill>
                 <a:latin typeface="+mn-lt"/>
+                <a:cs typeface="+mn-cs"/>
               </a:defRPr>
             </a:lvl1pPr>
           </a:lstStyle>
@@ -1851,6 +1875,7 @@
                   <a:srgbClr val="111111"/>
                 </a:solidFill>
                 <a:latin typeface="+mj-lt"/>
+                <a:cs typeface="+mj-cs"/>
               </a:defRPr>
             </a:lvl1pPr>
           </a:lstStyle>
@@ -1903,6 +1928,7 @@
                   <a:srgbClr val="5C5C5A"/>
                 </a:solidFill>
                 <a:latin typeface="+mn-lt"/>
+                <a:cs typeface="+mn-cs"/>
               </a:defRPr>
             </a:lvl1pPr>
           </a:lstStyle>
@@ -1980,6 +2006,7 @@
                   <a:srgbClr val="111111"/>
                 </a:solidFill>
                 <a:latin typeface="+mj-lt"/>
+                <a:cs typeface="+mj-cs"/>
               </a:defRPr>
             </a:lvl1pPr>
           </a:lstStyle>
@@ -2032,6 +2059,7 @@
                   <a:srgbClr val="111111"/>
                 </a:solidFill>
                 <a:latin typeface="+mn-lt"/>
+                <a:cs typeface="+mn-cs"/>
               </a:defRPr>
             </a:lvl1pPr>
           </a:lstStyle>
@@ -2084,6 +2112,7 @@
                   <a:srgbClr val="5C5C5A"/>
                 </a:solidFill>
                 <a:latin typeface="+mn-lt"/>
+                <a:cs typeface="+mn-cs"/>
               </a:defRPr>
             </a:lvl1pPr>
           </a:lstStyle>
@@ -2169,6 +2198,7 @@
                   <a:srgbClr val="111111"/>
                 </a:solidFill>
                 <a:latin typeface="+mj-lt"/>
+                <a:cs typeface="+mj-cs"/>
               </a:defRPr>
             </a:lvl1pPr>
           </a:lstStyle>
@@ -2221,6 +2251,7 @@
                   <a:srgbClr val="111111"/>
                 </a:solidFill>
                 <a:latin typeface="+mn-lt"/>
+                <a:cs typeface="+mn-cs"/>
               </a:defRPr>
             </a:lvl1pPr>
           </a:lstStyle>
@@ -2262,6 +2293,7 @@
             <a:srgbClr val="111111"/>
           </a:solidFill>
           <a:latin typeface="+mj-lt"/>
+          <a:cs typeface="+mj-cs"/>
         </a:defRPr>
       </a:lvl1pPr>
       <a:lvl2pPr marL="0" indent="0" algn="l">
@@ -2280,6 +2312,7 @@
             <a:srgbClr val="111111"/>
           </a:solidFill>
           <a:latin typeface="+mj-lt"/>
+          <a:cs typeface="+mj-cs"/>
         </a:defRPr>
       </a:lvl2pPr>
       <a:lvl3pPr marL="0" indent="0" algn="l">
@@ -2298,6 +2331,7 @@
             <a:srgbClr val="111111"/>
           </a:solidFill>
           <a:latin typeface="+mj-lt"/>
+          <a:cs typeface="+mj-cs"/>
         </a:defRPr>
       </a:lvl3pPr>
       <a:lvl4pPr marL="0" indent="0" algn="l">
@@ -2316,6 +2350,7 @@
             <a:srgbClr val="111111"/>
           </a:solidFill>
           <a:latin typeface="+mj-lt"/>
+          <a:cs typeface="+mj-cs"/>
         </a:defRPr>
       </a:lvl4pPr>
       <a:lvl5pPr marL="0" indent="0" algn="l">
@@ -2334,6 +2369,7 @@
             <a:srgbClr val="111111"/>
           </a:solidFill>
           <a:latin typeface="+mj-lt"/>
+          <a:cs typeface="+mj-cs"/>
         </a:defRPr>
       </a:lvl5pPr>
       <a:lvl6pPr marL="0" indent="0" algn="l">
@@ -2352,6 +2388,7 @@
             <a:srgbClr val="111111"/>
           </a:solidFill>
           <a:latin typeface="+mj-lt"/>
+          <a:cs typeface="+mj-cs"/>
         </a:defRPr>
       </a:lvl6pPr>
       <a:lvl7pPr marL="0" indent="0" algn="l">
@@ -2370,6 +2407,7 @@
             <a:srgbClr val="111111"/>
           </a:solidFill>
           <a:latin typeface="+mj-lt"/>
+          <a:cs typeface="+mj-cs"/>
         </a:defRPr>
       </a:lvl7pPr>
       <a:lvl8pPr marL="0" indent="0" algn="l">
@@ -2388,6 +2426,7 @@
             <a:srgbClr val="111111"/>
           </a:solidFill>
           <a:latin typeface="+mj-lt"/>
+          <a:cs typeface="+mj-cs"/>
         </a:defRPr>
       </a:lvl8pPr>
       <a:lvl9pPr marL="0" indent="0" algn="l">
@@ -2406,6 +2445,7 @@
             <a:srgbClr val="111111"/>
           </a:solidFill>
           <a:latin typeface="+mj-lt"/>
+          <a:cs typeface="+mj-cs"/>
         </a:defRPr>
       </a:lvl9pPr>
     </p:titleStyle>
@@ -2426,6 +2466,7 @@
             <a:srgbClr val="111111"/>
           </a:solidFill>
           <a:latin typeface="+mn-lt"/>
+          <a:cs typeface="+mn-cs"/>
         </a:defRPr>
       </a:lvl1pPr>
       <a:lvl2pPr marL="0" indent="0" algn="l">
@@ -2444,6 +2485,7 @@
             <a:srgbClr val="111111"/>
           </a:solidFill>
           <a:latin typeface="+mn-lt"/>
+          <a:cs typeface="+mn-cs"/>
         </a:defRPr>
       </a:lvl2pPr>
       <a:lvl3pPr marL="0" indent="0" algn="l">
@@ -2462,6 +2504,7 @@
             <a:srgbClr val="111111"/>
           </a:solidFill>
           <a:latin typeface="+mn-lt"/>
+          <a:cs typeface="+mn-cs"/>
         </a:defRPr>
       </a:lvl3pPr>
       <a:lvl4pPr marL="0" indent="0" algn="l">
@@ -2480,6 +2523,7 @@
             <a:srgbClr val="111111"/>
           </a:solidFill>
           <a:latin typeface="+mn-lt"/>
+          <a:cs typeface="+mn-cs"/>
         </a:defRPr>
       </a:lvl4pPr>
       <a:lvl5pPr marL="0" indent="0" algn="l">
@@ -2498,6 +2542,7 @@
             <a:srgbClr val="111111"/>
           </a:solidFill>
           <a:latin typeface="+mn-lt"/>
+          <a:cs typeface="+mn-cs"/>
         </a:defRPr>
       </a:lvl5pPr>
       <a:lvl6pPr marL="0" indent="0" algn="l">
@@ -2516,6 +2561,7 @@
             <a:srgbClr val="111111"/>
           </a:solidFill>
           <a:latin typeface="+mn-lt"/>
+          <a:cs typeface="+mn-cs"/>
         </a:defRPr>
       </a:lvl6pPr>
       <a:lvl7pPr marL="0" indent="0" algn="l">
@@ -2534,6 +2580,7 @@
             <a:srgbClr val="111111"/>
           </a:solidFill>
           <a:latin typeface="+mn-lt"/>
+          <a:cs typeface="+mn-cs"/>
         </a:defRPr>
       </a:lvl7pPr>
       <a:lvl8pPr marL="0" indent="0" algn="l">
@@ -2552,6 +2599,7 @@
             <a:srgbClr val="111111"/>
           </a:solidFill>
           <a:latin typeface="+mn-lt"/>
+          <a:cs typeface="+mn-cs"/>
         </a:defRPr>
       </a:lvl8pPr>
       <a:lvl9pPr marL="0" indent="0" algn="l">
@@ -2570,6 +2618,7 @@
             <a:srgbClr val="111111"/>
           </a:solidFill>
           <a:latin typeface="+mn-lt"/>
+          <a:cs typeface="+mn-cs"/>
         </a:defRPr>
       </a:lvl9pPr>
     </p:bodyStyle>
@@ -2590,6 +2639,7 @@
             <a:srgbClr val="111111"/>
           </a:solidFill>
           <a:latin typeface="+mn-lt"/>
+          <a:cs typeface="+mn-cs"/>
         </a:defRPr>
       </a:lvl1pPr>
       <a:lvl2pPr marL="0" indent="0" algn="l">
@@ -2608,6 +2658,7 @@
             <a:srgbClr val="111111"/>
           </a:solidFill>
           <a:latin typeface="+mn-lt"/>
+          <a:cs typeface="+mn-cs"/>
         </a:defRPr>
       </a:lvl2pPr>
       <a:lvl3pPr marL="0" indent="0" algn="l">
@@ -2626,6 +2677,7 @@
             <a:srgbClr val="111111"/>
           </a:solidFill>
           <a:latin typeface="+mn-lt"/>
+          <a:cs typeface="+mn-cs"/>
         </a:defRPr>
       </a:lvl3pPr>
       <a:lvl4pPr marL="0" indent="0" algn="l">
@@ -2644,6 +2696,7 @@
             <a:srgbClr val="111111"/>
           </a:solidFill>
           <a:latin typeface="+mn-lt"/>
+          <a:cs typeface="+mn-cs"/>
         </a:defRPr>
       </a:lvl4pPr>
       <a:lvl5pPr marL="0" indent="0" algn="l">
@@ -2662,6 +2715,7 @@
             <a:srgbClr val="111111"/>
           </a:solidFill>
           <a:latin typeface="+mn-lt"/>
+          <a:cs typeface="+mn-cs"/>
         </a:defRPr>
       </a:lvl5pPr>
       <a:lvl6pPr marL="0" indent="0" algn="l">
@@ -2680,6 +2734,7 @@
             <a:srgbClr val="111111"/>
           </a:solidFill>
           <a:latin typeface="+mn-lt"/>
+          <a:cs typeface="+mn-cs"/>
         </a:defRPr>
       </a:lvl6pPr>
       <a:lvl7pPr marL="0" indent="0" algn="l">
@@ -2698,6 +2753,7 @@
             <a:srgbClr val="111111"/>
           </a:solidFill>
           <a:latin typeface="+mn-lt"/>
+          <a:cs typeface="+mn-cs"/>
         </a:defRPr>
       </a:lvl7pPr>
       <a:lvl8pPr marL="0" indent="0" algn="l">
@@ -2716,6 +2772,7 @@
             <a:srgbClr val="111111"/>
           </a:solidFill>
           <a:latin typeface="+mn-lt"/>
+          <a:cs typeface="+mn-cs"/>
         </a:defRPr>
       </a:lvl8pPr>
       <a:lvl9pPr marL="0" indent="0" algn="l">
@@ -2734,6 +2791,7 @@
             <a:srgbClr val="111111"/>
           </a:solidFill>
           <a:latin typeface="+mn-lt"/>
+          <a:cs typeface="+mn-cs"/>
         </a:defRPr>
       </a:lvl9pPr>
     </p:otherStyle>
@@ -3151,12 +3209,12 @@
       <a:majorFont>
         <a:latin typeface="Arial"/>
         <a:ea typeface=""/>
-        <a:cs typeface=""/>
+        <a:cs typeface="Arial"/>
       </a:majorFont>
       <a:minorFont>
         <a:latin typeface="Arial"/>
         <a:ea typeface=""/>
-        <a:cs typeface=""/>
+        <a:cs typeface="Arial"/>
       </a:minorFont>
     </a:fontScheme>
     <a:fmtScheme name="swiss">
